--- a/slides/day4_reproducable_workflows.pptx
+++ b/slides/day4_reproducable_workflows.pptx
@@ -5,7 +5,7 @@
     <p:sldMasterId id="2147483648" r:id="rId1"/>
   </p:sldMasterIdLst>
   <p:notesMasterIdLst>
-    <p:notesMasterId r:id="rId30"/>
+    <p:notesMasterId r:id="rId27"/>
   </p:notesMasterIdLst>
   <p:sldIdLst>
     <p:sldId id="256" r:id="rId2"/>
@@ -32,10 +32,7 @@
     <p:sldId id="323" r:id="rId23"/>
     <p:sldId id="326" r:id="rId24"/>
     <p:sldId id="329" r:id="rId25"/>
-    <p:sldId id="299" r:id="rId26"/>
-    <p:sldId id="328" r:id="rId27"/>
-    <p:sldId id="300" r:id="rId28"/>
-    <p:sldId id="327" r:id="rId29"/>
+    <p:sldId id="328" r:id="rId26"/>
   </p:sldIdLst>
   <p:sldSz cx="12192000" cy="6858000"/>
   <p:notesSz cx="6858000" cy="9144000"/>
@@ -3184,114 +3181,6 @@
         <p:cNvPr id="1" name="">
           <a:extLst>
             <a:ext uri="{FF2B5EF4-FFF2-40B4-BE49-F238E27FC236}">
-              <a16:creationId xmlns:a16="http://schemas.microsoft.com/office/drawing/2014/main" id="{6FC85CA9-4ACF-0C12-F204-E3DDE660C1A6}"/>
-            </a:ext>
-          </a:extLst>
-        </p:cNvPr>
-        <p:cNvGrpSpPr/>
-        <p:nvPr/>
-      </p:nvGrpSpPr>
-      <p:grpSpPr>
-        <a:xfrm>
-          <a:off x="0" y="0"/>
-          <a:ext cx="0" cy="0"/>
-          <a:chOff x="0" y="0"/>
-          <a:chExt cx="0" cy="0"/>
-        </a:xfrm>
-      </p:grpSpPr>
-      <p:sp>
-        <p:nvSpPr>
-          <p:cNvPr id="2" name="Slide Image Placeholder 1">
-            <a:extLst>
-              <a:ext uri="{FF2B5EF4-FFF2-40B4-BE49-F238E27FC236}">
-                <a16:creationId xmlns:a16="http://schemas.microsoft.com/office/drawing/2014/main" id="{6834AAF6-9232-5DA3-CBD9-4AAB485AC0E3}"/>
-              </a:ext>
-            </a:extLst>
-          </p:cNvPr>
-          <p:cNvSpPr>
-            <a:spLocks noGrp="1" noRot="1" noChangeAspect="1"/>
-          </p:cNvSpPr>
-          <p:nvPr>
-            <p:ph type="sldImg"/>
-          </p:nvPr>
-        </p:nvSpPr>
-        <p:spPr/>
-      </p:sp>
-      <p:sp>
-        <p:nvSpPr>
-          <p:cNvPr id="3" name="Notes Placeholder 2">
-            <a:extLst>
-              <a:ext uri="{FF2B5EF4-FFF2-40B4-BE49-F238E27FC236}">
-                <a16:creationId xmlns:a16="http://schemas.microsoft.com/office/drawing/2014/main" id="{DEE8D338-BE63-F42C-438A-94F078A3AA5B}"/>
-              </a:ext>
-            </a:extLst>
-          </p:cNvPr>
-          <p:cNvSpPr>
-            <a:spLocks noGrp="1"/>
-          </p:cNvSpPr>
-          <p:nvPr>
-            <p:ph type="body" idx="1"/>
-          </p:nvPr>
-        </p:nvSpPr>
-        <p:spPr/>
-        <p:txBody>
-          <a:bodyPr/>
-          <a:lstStyle/>
-          <a:p>
-            <a:endParaRPr lang="en-US" dirty="0"/>
-          </a:p>
-        </p:txBody>
-      </p:sp>
-      <p:sp>
-        <p:nvSpPr>
-          <p:cNvPr id="4" name="Slide Number Placeholder 3">
-            <a:extLst>
-              <a:ext uri="{FF2B5EF4-FFF2-40B4-BE49-F238E27FC236}">
-                <a16:creationId xmlns:a16="http://schemas.microsoft.com/office/drawing/2014/main" id="{F1147A4E-DC9F-3F3D-95B9-153BC90C22B4}"/>
-              </a:ext>
-            </a:extLst>
-          </p:cNvPr>
-          <p:cNvSpPr>
-            <a:spLocks noGrp="1"/>
-          </p:cNvSpPr>
-          <p:nvPr>
-            <p:ph type="sldNum" sz="quarter" idx="5"/>
-          </p:nvPr>
-        </p:nvSpPr>
-        <p:spPr/>
-        <p:txBody>
-          <a:bodyPr/>
-          <a:lstStyle/>
-          <a:p>
-            <a:fld id="{FF78EFD2-C9A0-A146-8CE9-0A2B7CC7B867}" type="slidenum">
-              <a:rPr lang="en-US" smtClean="0"/>
-              <a:t>25</a:t>
-            </a:fld>
-            <a:endParaRPr lang="en-US"/>
-          </a:p>
-        </p:txBody>
-      </p:sp>
-    </p:spTree>
-    <p:extLst>
-      <p:ext uri="{BB962C8B-B14F-4D97-AF65-F5344CB8AC3E}">
-        <p14:creationId xmlns:p14="http://schemas.microsoft.com/office/powerpoint/2010/main" val="3523885080"/>
-      </p:ext>
-    </p:extLst>
-  </p:cSld>
-  <p:clrMapOvr>
-    <a:masterClrMapping/>
-  </p:clrMapOvr>
-</p:notes>
-</file>
-
-<file path=ppt/notesSlides/notesSlide25.xml><?xml version="1.0" encoding="utf-8"?>
-<p:notes xmlns:a="http://schemas.openxmlformats.org/drawingml/2006/main" xmlns:r="http://schemas.openxmlformats.org/officeDocument/2006/relationships" xmlns:p="http://schemas.openxmlformats.org/presentationml/2006/main">
-  <p:cSld>
-    <p:spTree>
-      <p:nvGrpSpPr>
-        <p:cNvPr id="1" name="">
-          <a:extLst>
-            <a:ext uri="{FF2B5EF4-FFF2-40B4-BE49-F238E27FC236}">
               <a16:creationId xmlns:a16="http://schemas.microsoft.com/office/drawing/2014/main" id="{485592D6-FA9E-3F16-39F8-4F8AEF93D135}"/>
             </a:ext>
           </a:extLst>
@@ -3373,7 +3262,7 @@
           <a:p>
             <a:fld id="{FF78EFD2-C9A0-A146-8CE9-0A2B7CC7B867}" type="slidenum">
               <a:rPr lang="en-US" smtClean="0"/>
-              <a:t>26</a:t>
+              <a:t>25</a:t>
             </a:fld>
             <a:endParaRPr lang="en-US"/>
           </a:p>
@@ -3383,222 +3272,6 @@
     <p:extLst>
       <p:ext uri="{BB962C8B-B14F-4D97-AF65-F5344CB8AC3E}">
         <p14:creationId xmlns:p14="http://schemas.microsoft.com/office/powerpoint/2010/main" val="113817083"/>
-      </p:ext>
-    </p:extLst>
-  </p:cSld>
-  <p:clrMapOvr>
-    <a:masterClrMapping/>
-  </p:clrMapOvr>
-</p:notes>
-</file>
-
-<file path=ppt/notesSlides/notesSlide26.xml><?xml version="1.0" encoding="utf-8"?>
-<p:notes xmlns:a="http://schemas.openxmlformats.org/drawingml/2006/main" xmlns:r="http://schemas.openxmlformats.org/officeDocument/2006/relationships" xmlns:p="http://schemas.openxmlformats.org/presentationml/2006/main">
-  <p:cSld>
-    <p:spTree>
-      <p:nvGrpSpPr>
-        <p:cNvPr id="1" name="">
-          <a:extLst>
-            <a:ext uri="{FF2B5EF4-FFF2-40B4-BE49-F238E27FC236}">
-              <a16:creationId xmlns:a16="http://schemas.microsoft.com/office/drawing/2014/main" id="{0318B3AF-1005-8703-9D91-6553AD173832}"/>
-            </a:ext>
-          </a:extLst>
-        </p:cNvPr>
-        <p:cNvGrpSpPr/>
-        <p:nvPr/>
-      </p:nvGrpSpPr>
-      <p:grpSpPr>
-        <a:xfrm>
-          <a:off x="0" y="0"/>
-          <a:ext cx="0" cy="0"/>
-          <a:chOff x="0" y="0"/>
-          <a:chExt cx="0" cy="0"/>
-        </a:xfrm>
-      </p:grpSpPr>
-      <p:sp>
-        <p:nvSpPr>
-          <p:cNvPr id="2" name="Slide Image Placeholder 1">
-            <a:extLst>
-              <a:ext uri="{FF2B5EF4-FFF2-40B4-BE49-F238E27FC236}">
-                <a16:creationId xmlns:a16="http://schemas.microsoft.com/office/drawing/2014/main" id="{FAB653FF-5DA9-D9F0-D02D-4ECB81C50E12}"/>
-              </a:ext>
-            </a:extLst>
-          </p:cNvPr>
-          <p:cNvSpPr>
-            <a:spLocks noGrp="1" noRot="1" noChangeAspect="1"/>
-          </p:cNvSpPr>
-          <p:nvPr>
-            <p:ph type="sldImg"/>
-          </p:nvPr>
-        </p:nvSpPr>
-        <p:spPr/>
-      </p:sp>
-      <p:sp>
-        <p:nvSpPr>
-          <p:cNvPr id="3" name="Notes Placeholder 2">
-            <a:extLst>
-              <a:ext uri="{FF2B5EF4-FFF2-40B4-BE49-F238E27FC236}">
-                <a16:creationId xmlns:a16="http://schemas.microsoft.com/office/drawing/2014/main" id="{10D5229A-8796-A4AC-7C95-D0874FDD728E}"/>
-              </a:ext>
-            </a:extLst>
-          </p:cNvPr>
-          <p:cNvSpPr>
-            <a:spLocks noGrp="1"/>
-          </p:cNvSpPr>
-          <p:nvPr>
-            <p:ph type="body" idx="1"/>
-          </p:nvPr>
-        </p:nvSpPr>
-        <p:spPr/>
-        <p:txBody>
-          <a:bodyPr/>
-          <a:lstStyle/>
-          <a:p>
-            <a:endParaRPr lang="en-US" dirty="0"/>
-          </a:p>
-        </p:txBody>
-      </p:sp>
-      <p:sp>
-        <p:nvSpPr>
-          <p:cNvPr id="4" name="Slide Number Placeholder 3">
-            <a:extLst>
-              <a:ext uri="{FF2B5EF4-FFF2-40B4-BE49-F238E27FC236}">
-                <a16:creationId xmlns:a16="http://schemas.microsoft.com/office/drawing/2014/main" id="{BB0C2AA4-172F-BE90-46CD-1954BC11B779}"/>
-              </a:ext>
-            </a:extLst>
-          </p:cNvPr>
-          <p:cNvSpPr>
-            <a:spLocks noGrp="1"/>
-          </p:cNvSpPr>
-          <p:nvPr>
-            <p:ph type="sldNum" sz="quarter" idx="5"/>
-          </p:nvPr>
-        </p:nvSpPr>
-        <p:spPr/>
-        <p:txBody>
-          <a:bodyPr/>
-          <a:lstStyle/>
-          <a:p>
-            <a:fld id="{FF78EFD2-C9A0-A146-8CE9-0A2B7CC7B867}" type="slidenum">
-              <a:rPr lang="en-US" smtClean="0"/>
-              <a:t>27</a:t>
-            </a:fld>
-            <a:endParaRPr lang="en-US"/>
-          </a:p>
-        </p:txBody>
-      </p:sp>
-    </p:spTree>
-    <p:extLst>
-      <p:ext uri="{BB962C8B-B14F-4D97-AF65-F5344CB8AC3E}">
-        <p14:creationId xmlns:p14="http://schemas.microsoft.com/office/powerpoint/2010/main" val="1698878162"/>
-      </p:ext>
-    </p:extLst>
-  </p:cSld>
-  <p:clrMapOvr>
-    <a:masterClrMapping/>
-  </p:clrMapOvr>
-</p:notes>
-</file>
-
-<file path=ppt/notesSlides/notesSlide27.xml><?xml version="1.0" encoding="utf-8"?>
-<p:notes xmlns:a="http://schemas.openxmlformats.org/drawingml/2006/main" xmlns:r="http://schemas.openxmlformats.org/officeDocument/2006/relationships" xmlns:p="http://schemas.openxmlformats.org/presentationml/2006/main">
-  <p:cSld>
-    <p:spTree>
-      <p:nvGrpSpPr>
-        <p:cNvPr id="1" name="">
-          <a:extLst>
-            <a:ext uri="{FF2B5EF4-FFF2-40B4-BE49-F238E27FC236}">
-              <a16:creationId xmlns:a16="http://schemas.microsoft.com/office/drawing/2014/main" id="{6316981A-C721-102F-64C2-A6398FC1993F}"/>
-            </a:ext>
-          </a:extLst>
-        </p:cNvPr>
-        <p:cNvGrpSpPr/>
-        <p:nvPr/>
-      </p:nvGrpSpPr>
-      <p:grpSpPr>
-        <a:xfrm>
-          <a:off x="0" y="0"/>
-          <a:ext cx="0" cy="0"/>
-          <a:chOff x="0" y="0"/>
-          <a:chExt cx="0" cy="0"/>
-        </a:xfrm>
-      </p:grpSpPr>
-      <p:sp>
-        <p:nvSpPr>
-          <p:cNvPr id="2" name="Slide Image Placeholder 1">
-            <a:extLst>
-              <a:ext uri="{FF2B5EF4-FFF2-40B4-BE49-F238E27FC236}">
-                <a16:creationId xmlns:a16="http://schemas.microsoft.com/office/drawing/2014/main" id="{3F89D656-CCDE-245D-2550-77FF4346EE99}"/>
-              </a:ext>
-            </a:extLst>
-          </p:cNvPr>
-          <p:cNvSpPr>
-            <a:spLocks noGrp="1" noRot="1" noChangeAspect="1"/>
-          </p:cNvSpPr>
-          <p:nvPr>
-            <p:ph type="sldImg"/>
-          </p:nvPr>
-        </p:nvSpPr>
-        <p:spPr/>
-      </p:sp>
-      <p:sp>
-        <p:nvSpPr>
-          <p:cNvPr id="3" name="Notes Placeholder 2">
-            <a:extLst>
-              <a:ext uri="{FF2B5EF4-FFF2-40B4-BE49-F238E27FC236}">
-                <a16:creationId xmlns:a16="http://schemas.microsoft.com/office/drawing/2014/main" id="{50F2CDCF-DA63-A95C-A646-746D1AAECD27}"/>
-              </a:ext>
-            </a:extLst>
-          </p:cNvPr>
-          <p:cNvSpPr>
-            <a:spLocks noGrp="1"/>
-          </p:cNvSpPr>
-          <p:nvPr>
-            <p:ph type="body" idx="1"/>
-          </p:nvPr>
-        </p:nvSpPr>
-        <p:spPr/>
-        <p:txBody>
-          <a:bodyPr/>
-          <a:lstStyle/>
-          <a:p>
-            <a:endParaRPr lang="en-US" dirty="0"/>
-          </a:p>
-        </p:txBody>
-      </p:sp>
-      <p:sp>
-        <p:nvSpPr>
-          <p:cNvPr id="4" name="Slide Number Placeholder 3">
-            <a:extLst>
-              <a:ext uri="{FF2B5EF4-FFF2-40B4-BE49-F238E27FC236}">
-                <a16:creationId xmlns:a16="http://schemas.microsoft.com/office/drawing/2014/main" id="{23A83197-D817-FF2C-ED69-A0027DEFB97B}"/>
-              </a:ext>
-            </a:extLst>
-          </p:cNvPr>
-          <p:cNvSpPr>
-            <a:spLocks noGrp="1"/>
-          </p:cNvSpPr>
-          <p:nvPr>
-            <p:ph type="sldNum" sz="quarter" idx="5"/>
-          </p:nvPr>
-        </p:nvSpPr>
-        <p:spPr/>
-        <p:txBody>
-          <a:bodyPr/>
-          <a:lstStyle/>
-          <a:p>
-            <a:fld id="{FF78EFD2-C9A0-A146-8CE9-0A2B7CC7B867}" type="slidenum">
-              <a:rPr lang="en-US" smtClean="0"/>
-              <a:t>28</a:t>
-            </a:fld>
-            <a:endParaRPr lang="en-US"/>
-          </a:p>
-        </p:txBody>
-      </p:sp>
-    </p:spTree>
-    <p:extLst>
-      <p:ext uri="{BB962C8B-B14F-4D97-AF65-F5344CB8AC3E}">
-        <p14:creationId xmlns:p14="http://schemas.microsoft.com/office/powerpoint/2010/main" val="2602258069"/>
       </p:ext>
     </p:extLst>
   </p:cSld>
@@ -11175,125 +10848,6 @@
         <p:cNvPr id="1" name="">
           <a:extLst>
             <a:ext uri="{FF2B5EF4-FFF2-40B4-BE49-F238E27FC236}">
-              <a16:creationId xmlns:a16="http://schemas.microsoft.com/office/drawing/2014/main" id="{B429CE78-3A65-D3FB-69CA-B88EBC5D3870}"/>
-            </a:ext>
-          </a:extLst>
-        </p:cNvPr>
-        <p:cNvGrpSpPr/>
-        <p:nvPr/>
-      </p:nvGrpSpPr>
-      <p:grpSpPr>
-        <a:xfrm>
-          <a:off x="0" y="0"/>
-          <a:ext cx="0" cy="0"/>
-          <a:chOff x="0" y="0"/>
-          <a:chExt cx="0" cy="0"/>
-        </a:xfrm>
-      </p:grpSpPr>
-      <p:sp>
-        <p:nvSpPr>
-          <p:cNvPr id="2" name="Title 1">
-            <a:extLst>
-              <a:ext uri="{FF2B5EF4-FFF2-40B4-BE49-F238E27FC236}">
-                <a16:creationId xmlns:a16="http://schemas.microsoft.com/office/drawing/2014/main" id="{D2B32DDE-A9D4-D9DE-D61A-5E3625D2FF09}"/>
-              </a:ext>
-            </a:extLst>
-          </p:cNvPr>
-          <p:cNvSpPr>
-            <a:spLocks noGrp="1"/>
-          </p:cNvSpPr>
-          <p:nvPr>
-            <p:ph type="title"/>
-          </p:nvPr>
-        </p:nvSpPr>
-        <p:spPr/>
-        <p:txBody>
-          <a:bodyPr>
-            <a:normAutofit/>
-          </a:bodyPr>
-          <a:lstStyle/>
-          <a:p>
-            <a:r>
-              <a:rPr lang="en-US" sz="4200" dirty="0">
-                <a:solidFill>
-                  <a:schemeClr val="accent1"/>
-                </a:solidFill>
-              </a:rPr>
-              <a:t>Reproduceable Workflows</a:t>
-            </a:r>
-          </a:p>
-        </p:txBody>
-      </p:sp>
-      <p:sp>
-        <p:nvSpPr>
-          <p:cNvPr id="5" name="Content Placeholder 2">
-            <a:extLst>
-              <a:ext uri="{FF2B5EF4-FFF2-40B4-BE49-F238E27FC236}">
-                <a16:creationId xmlns:a16="http://schemas.microsoft.com/office/drawing/2014/main" id="{3093EB2B-E9E9-F466-3630-F6EDA7E1C4A0}"/>
-              </a:ext>
-            </a:extLst>
-          </p:cNvPr>
-          <p:cNvSpPr>
-            <a:spLocks noGrp="1"/>
-          </p:cNvSpPr>
-          <p:nvPr>
-            <p:ph idx="1"/>
-          </p:nvPr>
-        </p:nvSpPr>
-        <p:spPr>
-          <a:xfrm>
-            <a:off x="838200" y="1720525"/>
-            <a:ext cx="10515600" cy="4351338"/>
-          </a:xfrm>
-        </p:spPr>
-        <p:txBody>
-          <a:bodyPr>
-            <a:normAutofit/>
-          </a:bodyPr>
-          <a:lstStyle/>
-          <a:p>
-            <a:r>
-              <a:rPr lang="en-US" dirty="0">
-                <a:solidFill>
-                  <a:schemeClr val="accent1"/>
-                </a:solidFill>
-              </a:rPr>
-              <a:t>day_04_reproducible_project.py</a:t>
-            </a:r>
-          </a:p>
-          <a:p>
-            <a:r>
-              <a:rPr lang="en-US" dirty="0">
-                <a:solidFill>
-                  <a:schemeClr val="accent1"/>
-                </a:solidFill>
-              </a:rPr>
-              <a:t>01_api_Wikipedia_simple.py</a:t>
-            </a:r>
-          </a:p>
-        </p:txBody>
-      </p:sp>
-    </p:spTree>
-    <p:extLst>
-      <p:ext uri="{BB962C8B-B14F-4D97-AF65-F5344CB8AC3E}">
-        <p14:creationId xmlns:p14="http://schemas.microsoft.com/office/powerpoint/2010/main" val="1288507027"/>
-      </p:ext>
-    </p:extLst>
-  </p:cSld>
-  <p:clrMapOvr>
-    <a:masterClrMapping/>
-  </p:clrMapOvr>
-</p:sld>
-</file>
-
-<file path=ppt/slides/slide26.xml><?xml version="1.0" encoding="utf-8"?>
-<p:sld xmlns:a="http://schemas.openxmlformats.org/drawingml/2006/main" xmlns:r="http://schemas.openxmlformats.org/officeDocument/2006/relationships" xmlns:p="http://schemas.openxmlformats.org/presentationml/2006/main">
-  <p:cSld>
-    <p:spTree>
-      <p:nvGrpSpPr>
-        <p:cNvPr id="1" name="">
-          <a:extLst>
-            <a:ext uri="{FF2B5EF4-FFF2-40B4-BE49-F238E27FC236}">
               <a16:creationId xmlns:a16="http://schemas.microsoft.com/office/drawing/2014/main" id="{A9F9ECC5-1347-C54D-E55B-5691E887DF63}"/>
             </a:ext>
           </a:extLst>
@@ -11510,370 +11064,6 @@
     <p:extLst>
       <p:ext uri="{BB962C8B-B14F-4D97-AF65-F5344CB8AC3E}">
         <p14:creationId xmlns:p14="http://schemas.microsoft.com/office/powerpoint/2010/main" val="252078505"/>
-      </p:ext>
-    </p:extLst>
-  </p:cSld>
-  <p:clrMapOvr>
-    <a:masterClrMapping/>
-  </p:clrMapOvr>
-</p:sld>
-</file>
-
-<file path=ppt/slides/slide27.xml><?xml version="1.0" encoding="utf-8"?>
-<p:sld xmlns:a="http://schemas.openxmlformats.org/drawingml/2006/main" xmlns:r="http://schemas.openxmlformats.org/officeDocument/2006/relationships" xmlns:p="http://schemas.openxmlformats.org/presentationml/2006/main">
-  <p:cSld>
-    <p:spTree>
-      <p:nvGrpSpPr>
-        <p:cNvPr id="1" name="">
-          <a:extLst>
-            <a:ext uri="{FF2B5EF4-FFF2-40B4-BE49-F238E27FC236}">
-              <a16:creationId xmlns:a16="http://schemas.microsoft.com/office/drawing/2014/main" id="{83F76863-F38F-34B3-3F2A-C86F68594F25}"/>
-            </a:ext>
-          </a:extLst>
-        </p:cNvPr>
-        <p:cNvGrpSpPr/>
-        <p:nvPr/>
-      </p:nvGrpSpPr>
-      <p:grpSpPr>
-        <a:xfrm>
-          <a:off x="0" y="0"/>
-          <a:ext cx="0" cy="0"/>
-          <a:chOff x="0" y="0"/>
-          <a:chExt cx="0" cy="0"/>
-        </a:xfrm>
-      </p:grpSpPr>
-      <p:sp>
-        <p:nvSpPr>
-          <p:cNvPr id="2" name="Title 1">
-            <a:extLst>
-              <a:ext uri="{FF2B5EF4-FFF2-40B4-BE49-F238E27FC236}">
-                <a16:creationId xmlns:a16="http://schemas.microsoft.com/office/drawing/2014/main" id="{48F81A65-89C5-0414-7F89-7743A0720A0F}"/>
-              </a:ext>
-            </a:extLst>
-          </p:cNvPr>
-          <p:cNvSpPr>
-            <a:spLocks noGrp="1"/>
-          </p:cNvSpPr>
-          <p:nvPr>
-            <p:ph type="title"/>
-          </p:nvPr>
-        </p:nvSpPr>
-        <p:spPr/>
-        <p:txBody>
-          <a:bodyPr>
-            <a:normAutofit/>
-          </a:bodyPr>
-          <a:lstStyle/>
-          <a:p>
-            <a:r>
-              <a:rPr lang="en-US" sz="4200" dirty="0">
-                <a:solidFill>
-                  <a:schemeClr val="accent1"/>
-                </a:solidFill>
-              </a:rPr>
-              <a:t>Practical Collection Workflow</a:t>
-            </a:r>
-          </a:p>
-        </p:txBody>
-      </p:sp>
-      <p:sp>
-        <p:nvSpPr>
-          <p:cNvPr id="5" name="Content Placeholder 2">
-            <a:extLst>
-              <a:ext uri="{FF2B5EF4-FFF2-40B4-BE49-F238E27FC236}">
-                <a16:creationId xmlns:a16="http://schemas.microsoft.com/office/drawing/2014/main" id="{792D31FE-EF43-B573-612C-0C1E0BB66C83}"/>
-              </a:ext>
-            </a:extLst>
-          </p:cNvPr>
-          <p:cNvSpPr>
-            <a:spLocks noGrp="1"/>
-          </p:cNvSpPr>
-          <p:nvPr>
-            <p:ph idx="1"/>
-          </p:nvPr>
-        </p:nvSpPr>
-        <p:spPr>
-          <a:xfrm>
-            <a:off x="838200" y="1720525"/>
-            <a:ext cx="10515600" cy="4351338"/>
-          </a:xfrm>
-        </p:spPr>
-        <p:txBody>
-          <a:bodyPr>
-            <a:normAutofit/>
-          </a:bodyPr>
-          <a:lstStyle/>
-          <a:p>
-            <a:pPr marL="0" indent="0">
-              <a:buNone/>
-            </a:pPr>
-            <a:r>
-              <a:rPr lang="en-US" u="sng" dirty="0">
-                <a:solidFill>
-                  <a:srgbClr val="005174"/>
-                </a:solidFill>
-              </a:rPr>
-              <a:t>09_practical_collection_workflow.py</a:t>
-            </a:r>
-          </a:p>
-          <a:p>
-            <a:r>
-              <a:rPr lang="en-US" dirty="0">
-                <a:solidFill>
-                  <a:schemeClr val="accent1"/>
-                </a:solidFill>
-              </a:rPr>
-              <a:t>create a run folder</a:t>
-            </a:r>
-          </a:p>
-          <a:p>
-            <a:r>
-              <a:rPr lang="en-US" dirty="0">
-                <a:solidFill>
-                  <a:schemeClr val="accent1"/>
-                </a:solidFill>
-              </a:rPr>
-              <a:t>save config snapshot</a:t>
-            </a:r>
-          </a:p>
-          <a:p>
-            <a:r>
-              <a:rPr lang="en-US" dirty="0">
-                <a:solidFill>
-                  <a:schemeClr val="accent1"/>
-                </a:solidFill>
-              </a:rPr>
-              <a:t>write logs</a:t>
-            </a:r>
-          </a:p>
-          <a:p>
-            <a:r>
-              <a:rPr lang="en-US" dirty="0">
-                <a:solidFill>
-                  <a:schemeClr val="accent1"/>
-                </a:solidFill>
-              </a:rPr>
-              <a:t>run monitoring checks</a:t>
-            </a:r>
-          </a:p>
-          <a:p>
-            <a:r>
-              <a:rPr lang="en-US" dirty="0">
-                <a:solidFill>
-                  <a:schemeClr val="accent1"/>
-                </a:solidFill>
-              </a:rPr>
-              <a:t>record version info</a:t>
-            </a:r>
-          </a:p>
-          <a:p>
-            <a:r>
-              <a:rPr lang="en-US" dirty="0">
-                <a:solidFill>
-                  <a:schemeClr val="accent1"/>
-                </a:solidFill>
-              </a:rPr>
-              <a:t>write scheduling examples</a:t>
-            </a:r>
-          </a:p>
-          <a:p>
-            <a:r>
-              <a:rPr lang="en-US" dirty="0">
-                <a:solidFill>
-                  <a:schemeClr val="accent1"/>
-                </a:solidFill>
-              </a:rPr>
-              <a:t>write manifest</a:t>
-            </a:r>
-          </a:p>
-        </p:txBody>
-      </p:sp>
-    </p:spTree>
-    <p:extLst>
-      <p:ext uri="{BB962C8B-B14F-4D97-AF65-F5344CB8AC3E}">
-        <p14:creationId xmlns:p14="http://schemas.microsoft.com/office/powerpoint/2010/main" val="1055078819"/>
-      </p:ext>
-    </p:extLst>
-  </p:cSld>
-  <p:clrMapOvr>
-    <a:masterClrMapping/>
-  </p:clrMapOvr>
-</p:sld>
-</file>
-
-<file path=ppt/slides/slide28.xml><?xml version="1.0" encoding="utf-8"?>
-<p:sld xmlns:a="http://schemas.openxmlformats.org/drawingml/2006/main" xmlns:r="http://schemas.openxmlformats.org/officeDocument/2006/relationships" xmlns:p="http://schemas.openxmlformats.org/presentationml/2006/main">
-  <p:cSld>
-    <p:spTree>
-      <p:nvGrpSpPr>
-        <p:cNvPr id="1" name="">
-          <a:extLst>
-            <a:ext uri="{FF2B5EF4-FFF2-40B4-BE49-F238E27FC236}">
-              <a16:creationId xmlns:a16="http://schemas.microsoft.com/office/drawing/2014/main" id="{0FDF68ED-6EC0-6461-551B-B8BC8405A92C}"/>
-            </a:ext>
-          </a:extLst>
-        </p:cNvPr>
-        <p:cNvGrpSpPr/>
-        <p:nvPr/>
-      </p:nvGrpSpPr>
-      <p:grpSpPr>
-        <a:xfrm>
-          <a:off x="0" y="0"/>
-          <a:ext cx="0" cy="0"/>
-          <a:chOff x="0" y="0"/>
-          <a:chExt cx="0" cy="0"/>
-        </a:xfrm>
-      </p:grpSpPr>
-      <p:sp>
-        <p:nvSpPr>
-          <p:cNvPr id="2" name="Title 1">
-            <a:extLst>
-              <a:ext uri="{FF2B5EF4-FFF2-40B4-BE49-F238E27FC236}">
-                <a16:creationId xmlns:a16="http://schemas.microsoft.com/office/drawing/2014/main" id="{17AC6163-70F8-8339-279C-FA9ED9B8DA92}"/>
-              </a:ext>
-            </a:extLst>
-          </p:cNvPr>
-          <p:cNvSpPr>
-            <a:spLocks noGrp="1"/>
-          </p:cNvSpPr>
-          <p:nvPr>
-            <p:ph type="title"/>
-          </p:nvPr>
-        </p:nvSpPr>
-        <p:spPr/>
-        <p:txBody>
-          <a:bodyPr>
-            <a:normAutofit/>
-          </a:bodyPr>
-          <a:lstStyle/>
-          <a:p>
-            <a:r>
-              <a:rPr lang="en-US" sz="4200" dirty="0">
-                <a:solidFill>
-                  <a:schemeClr val="accent1"/>
-                </a:solidFill>
-              </a:rPr>
-              <a:t>Practical Collection Workflow</a:t>
-            </a:r>
-          </a:p>
-        </p:txBody>
-      </p:sp>
-      <p:sp>
-        <p:nvSpPr>
-          <p:cNvPr id="5" name="Content Placeholder 2">
-            <a:extLst>
-              <a:ext uri="{FF2B5EF4-FFF2-40B4-BE49-F238E27FC236}">
-                <a16:creationId xmlns:a16="http://schemas.microsoft.com/office/drawing/2014/main" id="{7EE721E4-3D72-F340-2FB4-741CDDC85721}"/>
-              </a:ext>
-            </a:extLst>
-          </p:cNvPr>
-          <p:cNvSpPr>
-            <a:spLocks noGrp="1"/>
-          </p:cNvSpPr>
-          <p:nvPr>
-            <p:ph idx="1"/>
-          </p:nvPr>
-        </p:nvSpPr>
-        <p:spPr>
-          <a:xfrm>
-            <a:off x="838200" y="1720525"/>
-            <a:ext cx="10515600" cy="4351338"/>
-          </a:xfrm>
-        </p:spPr>
-        <p:txBody>
-          <a:bodyPr>
-            <a:normAutofit/>
-          </a:bodyPr>
-          <a:lstStyle/>
-          <a:p>
-            <a:pPr marL="0" indent="0">
-              <a:buNone/>
-            </a:pPr>
-            <a:r>
-              <a:rPr lang="en-US" u="sng" dirty="0">
-                <a:solidFill>
-                  <a:srgbClr val="005174"/>
-                </a:solidFill>
-              </a:rPr>
-              <a:t>09_practical_collection_workflow.py</a:t>
-            </a:r>
-          </a:p>
-          <a:p>
-            <a:r>
-              <a:rPr lang="en-US" dirty="0">
-                <a:solidFill>
-                  <a:schemeClr val="accent1"/>
-                </a:solidFill>
-              </a:rPr>
-              <a:t>create a run folder</a:t>
-            </a:r>
-          </a:p>
-          <a:p>
-            <a:r>
-              <a:rPr lang="en-US" dirty="0">
-                <a:solidFill>
-                  <a:schemeClr val="accent1"/>
-                </a:solidFill>
-              </a:rPr>
-              <a:t>save config snapshot</a:t>
-            </a:r>
-          </a:p>
-          <a:p>
-            <a:r>
-              <a:rPr lang="en-US" dirty="0">
-                <a:solidFill>
-                  <a:schemeClr val="accent1"/>
-                </a:solidFill>
-              </a:rPr>
-              <a:t>write logs</a:t>
-            </a:r>
-          </a:p>
-          <a:p>
-            <a:r>
-              <a:rPr lang="en-US" dirty="0">
-                <a:solidFill>
-                  <a:schemeClr val="accent1"/>
-                </a:solidFill>
-              </a:rPr>
-              <a:t>run monitoring checks</a:t>
-            </a:r>
-          </a:p>
-          <a:p>
-            <a:r>
-              <a:rPr lang="en-US" dirty="0">
-                <a:solidFill>
-                  <a:schemeClr val="accent1"/>
-                </a:solidFill>
-              </a:rPr>
-              <a:t>record version info</a:t>
-            </a:r>
-          </a:p>
-          <a:p>
-            <a:r>
-              <a:rPr lang="en-US" dirty="0">
-                <a:solidFill>
-                  <a:schemeClr val="accent1"/>
-                </a:solidFill>
-              </a:rPr>
-              <a:t>write scheduling examples</a:t>
-            </a:r>
-          </a:p>
-          <a:p>
-            <a:r>
-              <a:rPr lang="en-US" dirty="0">
-                <a:solidFill>
-                  <a:schemeClr val="accent1"/>
-                </a:solidFill>
-              </a:rPr>
-              <a:t>write manifest</a:t>
-            </a:r>
-          </a:p>
-        </p:txBody>
-      </p:sp>
-    </p:spTree>
-    <p:extLst>
-      <p:ext uri="{BB962C8B-B14F-4D97-AF65-F5344CB8AC3E}">
-        <p14:creationId xmlns:p14="http://schemas.microsoft.com/office/powerpoint/2010/main" val="472353089"/>
       </p:ext>
     </p:extLst>
   </p:cSld>
